--- a/investor-pack/Trade-Assistant-Investor-Deck.pptx
+++ b/investor-pack/Trade-Assistant-Investor-Deck.pptx
@@ -1055,7 +1055,7 @@
           <a:p>
             <a:r>
               <a:rPr lang="en-US" dirty="0"/>
-              <a:t>Tie the raise to the validation milestone, not to a return target. Promising a return figure from evidence this thin is exactly the behaviour the rest of the deck argues against.</a:t>
+              <a:t>The £1m ask is explicitly structured to maximize capital deployed (£900k) vs overhead (£100k). Emphasize that the operating budget goes directly to AI computation speed and better data feeds.</a:t>
             </a:r>
             <a:endParaRPr lang="en-US" dirty="0"/>
           </a:p>
@@ -1407,7 +1407,7 @@
           <a:p>
             <a:r>
               <a:rPr lang="en-US" dirty="0"/>
-              <a:t>If asked 'how has it done live' — answer directly: too early to say, zero closed trades, and anyone quoting live performance after two days is telling you something about themselves.</a:t>
+              <a:t>If asked 'how has it done live' — answer directly: we have early live execution proving the pipes, but anyone quoting live performance after a few days is telling you something about themselves.</a:t>
             </a:r>
             <a:endParaRPr lang="en-US" dirty="0"/>
           </a:p>
@@ -2357,7 +2357,7 @@
                 <a:ea typeface="Calibri" pitchFamily="34" charset="-122"/>
                 <a:cs typeface="Calibri" pitchFamily="34" charset="-120"/>
               </a:rPr>
-              <a:t>12 strategies from published papers   ·   528 instruments   ·   8.94 years</a:t>
+              <a:t>34 strategies from published papers   ·   528 instruments   ·   8.94 years</a:t>
             </a:r>
             <a:endParaRPr lang="en-US" sz="1350" dirty="0"/>
           </a:p>
@@ -2416,7 +2416,7 @@
                 <a:ea typeface="Calibri" pitchFamily="34" charset="-122"/>
                 <a:cs typeface="Calibri" pitchFamily="34" charset="-120"/>
               </a:rPr>
-              <a:t>Investor briefing  ·  17 August 2026  ·  Research only — not financial advice</a:t>
+              <a:t>Investor briefing  ·  6 September 2026  ·  Research only — not financial advice</a:t>
             </a:r>
             <a:endParaRPr lang="en-US" sz="1050" dirty="0"/>
           </a:p>
@@ -3452,7 +3452,7 @@
                 <a:ea typeface="Cambria" pitchFamily="34" charset="-122"/>
                 <a:cs typeface="Cambria" pitchFamily="34" charset="-120"/>
               </a:rPr>
-              <a:t>£[AMOUNT] to fund [N] months of full-time development</a:t>
+              <a:t>£1,000,000 to scale the live system</a:t>
             </a:r>
             <a:endParaRPr lang="en-US" sz="2700" dirty="0"/>
           </a:p>
@@ -3491,7 +3491,7 @@
                 <a:ea typeface="Calibri" pitchFamily="34" charset="-122"/>
                 <a:cs typeface="Calibri" pitchFamily="34" charset="-120"/>
               </a:rPr>
-              <a:t>Replace the bracketed figures before sending — see the accompanying notes.</a:t>
+              <a:t>The majority of capital is deployed to trading, keeping overhead deliberately lean.</a:t>
             </a:r>
             <a:endParaRPr lang="en-US" sz="1200" dirty="0"/>
           </a:p>
@@ -3505,12 +3505,12 @@
         </p:nvSpPr>
         <p:spPr>
           <a:xfrm>
-            <a:off x="640080" y="3429000"/>
-            <a:ext cx="10881360" cy="786384"/>
+            <a:off x="640080" y="3520440"/>
+            <a:ext cx="10881360" cy="914400"/>
           </a:xfrm>
           <a:prstGeom prst="roundRect">
             <a:avLst>
-              <a:gd name="adj" fmla="val 6977"/>
+              <a:gd name="adj" fmla="val 6000"/>
             </a:avLst>
           </a:prstGeom>
           <a:solidFill>
@@ -3539,7 +3539,7 @@
         </p:nvSpPr>
         <p:spPr>
           <a:xfrm>
-            <a:off x="914400" y="3611880"/>
+            <a:off x="914400" y="3767328"/>
             <a:ext cx="420624" cy="420624"/>
           </a:xfrm>
           <a:prstGeom prst="ellipse">
@@ -3564,7 +3564,7 @@
         </p:nvSpPr>
         <p:spPr>
           <a:xfrm>
-            <a:off x="914400" y="3611880"/>
+            <a:off x="914400" y="3767328"/>
             <a:ext cx="420624" cy="420624"/>
           </a:xfrm>
           <a:prstGeom prst="rect">
@@ -3603,8 +3603,8 @@
         </p:nvSpPr>
         <p:spPr>
           <a:xfrm>
-            <a:off x="1517904" y="3538728"/>
-            <a:ext cx="2651760" cy="320040"/>
+            <a:off x="1600200" y="3703320"/>
+            <a:ext cx="3474720" cy="320040"/>
           </a:xfrm>
           <a:prstGeom prst="rect">
             <a:avLst/>
@@ -3628,7 +3628,7 @@
                 <a:ea typeface="Calibri" pitchFamily="34" charset="-122"/>
                 <a:cs typeface="Calibri" pitchFamily="34" charset="-120"/>
               </a:rPr>
-              <a:t>Research validation</a:t>
+              <a:t>£900,000 — Exchange Investment</a:t>
             </a:r>
             <a:endParaRPr lang="en-US" sz="1400" dirty="0"/>
           </a:p>
@@ -3642,8 +3642,8 @@
         </p:nvSpPr>
         <p:spPr>
           <a:xfrm>
-            <a:off x="4114800" y="3538728"/>
-            <a:ext cx="7132320" cy="566928"/>
+            <a:off x="5120640" y="3703320"/>
+            <a:ext cx="6217920" cy="566928"/>
           </a:xfrm>
           <a:prstGeom prst="rect">
             <a:avLst/>
@@ -3659,7 +3659,7 @@
               <a:buNone/>
             </a:pPr>
             <a:r>
-              <a:rPr lang="en-US" sz="1150" dirty="0">
+              <a:rPr lang="en-US" sz="1200" dirty="0">
                 <a:solidFill>
                   <a:srgbClr val="5A6B8C"/>
                 </a:solidFill>
@@ -3667,9 +3667,9 @@
                 <a:ea typeface="Calibri" pitchFamily="34" charset="-122"/>
                 <a:cs typeface="Calibri" pitchFamily="34" charset="-120"/>
               </a:rPr>
-              <a:t>Walk-forward testing across regimes, honest futures sizing, and re-running the study against the questions raised above.</a:t>
-            </a:r>
-            <a:endParaRPr lang="en-US" sz="1150" dirty="0"/>
+              <a:t>Capital directly invested into the exchange to provide the primary trading capital for the system's live operation.</a:t>
+            </a:r>
+            <a:endParaRPr lang="en-US" sz="1200" dirty="0"/>
           </a:p>
         </p:txBody>
       </p:sp>
@@ -3681,12 +3681,12 @@
         </p:nvSpPr>
         <p:spPr>
           <a:xfrm>
-            <a:off x="640080" y="4343400"/>
-            <a:ext cx="10881360" cy="786384"/>
+            <a:off x="640080" y="4709160"/>
+            <a:ext cx="10881360" cy="914400"/>
           </a:xfrm>
           <a:prstGeom prst="roundRect">
             <a:avLst>
-              <a:gd name="adj" fmla="val 6977"/>
+              <a:gd name="adj" fmla="val 6000"/>
             </a:avLst>
           </a:prstGeom>
           <a:solidFill>
@@ -3715,7 +3715,7 @@
         </p:nvSpPr>
         <p:spPr>
           <a:xfrm>
-            <a:off x="914400" y="4526280"/>
+            <a:off x="914400" y="4956048"/>
             <a:ext cx="420624" cy="420624"/>
           </a:xfrm>
           <a:prstGeom prst="ellipse">
@@ -3740,7 +3740,7 @@
         </p:nvSpPr>
         <p:spPr>
           <a:xfrm>
-            <a:off x="914400" y="4526280"/>
+            <a:off x="914400" y="4956048"/>
             <a:ext cx="420624" cy="420624"/>
           </a:xfrm>
           <a:prstGeom prst="rect">
@@ -3779,8 +3779,8 @@
         </p:nvSpPr>
         <p:spPr>
           <a:xfrm>
-            <a:off x="1517904" y="4453128"/>
-            <a:ext cx="2651760" cy="320040"/>
+            <a:off x="1600200" y="4892040"/>
+            <a:ext cx="3474720" cy="320040"/>
           </a:xfrm>
           <a:prstGeom prst="rect">
             <a:avLst/>
@@ -3804,7 +3804,7 @@
                 <a:ea typeface="Calibri" pitchFamily="34" charset="-122"/>
                 <a:cs typeface="Calibri" pitchFamily="34" charset="-120"/>
               </a:rPr>
-              <a:t>Data</a:t>
+              <a:t>£100,000 — Official Work &amp; Data</a:t>
             </a:r>
             <a:endParaRPr lang="en-US" sz="1400" dirty="0"/>
           </a:p>
@@ -3818,8 +3818,8 @@
         </p:nvSpPr>
         <p:spPr>
           <a:xfrm>
-            <a:off x="4114800" y="4453128"/>
-            <a:ext cx="7132320" cy="566928"/>
+            <a:off x="5120640" y="4892040"/>
+            <a:ext cx="6217920" cy="566928"/>
           </a:xfrm>
           <a:prstGeom prst="rect">
             <a:avLst/>
@@ -3835,7 +3835,7 @@
               <a:buNone/>
             </a:pPr>
             <a:r>
-              <a:rPr lang="en-US" sz="1150" dirty="0">
+              <a:rPr lang="en-US" sz="1200" dirty="0">
                 <a:solidFill>
                   <a:srgbClr val="5A6B8C"/>
                 </a:solidFill>
@@ -3843,222 +3843,46 @@
                 <a:ea typeface="Calibri" pitchFamily="34" charset="-122"/>
                 <a:cs typeface="Calibri" pitchFamily="34" charset="-120"/>
               </a:rPr>
-              <a:t>Market-data subscriptions the account does not hold — spot FX, and options data for a defined-risk hedging sleeve.</a:t>
-            </a:r>
-            <a:endParaRPr lang="en-US" sz="1150" dirty="0"/>
-          </a:p>
-        </p:txBody>
-      </p:sp>
-      <p:sp>
-        <p:nvSpPr>
-          <p:cNvPr id="17" name="Shape 15"/>
-          <p:cNvSpPr/>
-          <p:nvPr/>
-        </p:nvSpPr>
-        <p:spPr>
-          <a:xfrm>
-            <a:off x="640080" y="5257800"/>
-            <a:ext cx="10881360" cy="786384"/>
-          </a:xfrm>
-          <a:prstGeom prst="roundRect">
-            <a:avLst>
-              <a:gd name="adj" fmla="val 6977"/>
-            </a:avLst>
-          </a:prstGeom>
-          <a:solidFill>
-            <a:srgbClr val="FFFFFF"/>
-          </a:solidFill>
-          <a:ln w="12700">
-            <a:solidFill>
-              <a:srgbClr val="E2E8F2"/>
-            </a:solidFill>
-            <a:prstDash val="solid"/>
-          </a:ln>
-          <a:effectLst>
-            <a:outerShdw sx="100000" sy="100000" kx="0" ky="0" algn="bl" rotWithShape="0" blurRad="101600" dist="12700" dir="5400000">
-              <a:srgbClr val="9AA8C0">
-                <a:alpha val="18000"/>
-              </a:srgbClr>
-            </a:outerShdw>
-          </a:effectLst>
-        </p:spPr>
-      </p:sp>
-      <p:sp>
-        <p:nvSpPr>
-          <p:cNvPr id="18" name="Shape 16"/>
-          <p:cNvSpPr/>
-          <p:nvPr/>
-        </p:nvSpPr>
-        <p:spPr>
-          <a:xfrm>
-            <a:off x="914400" y="5440680"/>
-            <a:ext cx="420624" cy="420624"/>
-          </a:xfrm>
-          <a:prstGeom prst="ellipse">
-            <a:avLst/>
-          </a:prstGeom>
-          <a:solidFill>
-            <a:srgbClr val="1E2761"/>
-          </a:solidFill>
-          <a:ln w="12700">
-            <a:solidFill>
-              <a:srgbClr val="1E2761"/>
-            </a:solidFill>
-            <a:prstDash val="solid"/>
-          </a:ln>
-        </p:spPr>
-      </p:sp>
-      <p:sp>
-        <p:nvSpPr>
-          <p:cNvPr id="19" name="Text 17"/>
-          <p:cNvSpPr/>
-          <p:nvPr/>
-        </p:nvSpPr>
-        <p:spPr>
-          <a:xfrm>
-            <a:off x="914400" y="5440680"/>
-            <a:ext cx="420624" cy="420624"/>
-          </a:xfrm>
-          <a:prstGeom prst="rect">
-            <a:avLst/>
-          </a:prstGeom>
-          <a:noFill/>
-          <a:ln/>
-        </p:spPr>
-        <p:txBody>
-          <a:bodyPr wrap="square" lIns="0" tIns="0" rIns="0" bIns="0" rtlCol="0" anchor="ctr"/>
-          <a:lstStyle/>
-          <a:p>
-            <a:pPr algn="ctr" indent="0" marL="0">
-              <a:buNone/>
-            </a:pPr>
-            <a:r>
-              <a:rPr lang="en-US" sz="1500" b="1" dirty="0">
-                <a:solidFill>
-                  <a:srgbClr val="FFFFFF"/>
+              <a:t>Allocated to acquiring quicker, higher-quality data for bettering the system, and upgrading AI infrastructure to increase computation speed.</a:t>
+            </a:r>
+            <a:endParaRPr lang="en-US" sz="1200" dirty="0"/>
+          </a:p>
+        </p:txBody>
+      </p:sp>
+      <p:sp>
+        <p:nvSpPr>
+          <p:cNvPr id="17" name="Text 15"/>
+          <p:cNvSpPr/>
+          <p:nvPr/>
+        </p:nvSpPr>
+        <p:spPr>
+          <a:xfrm>
+            <a:off x="640080" y="6172200"/>
+            <a:ext cx="10881360" cy="365760"/>
+          </a:xfrm>
+          <a:prstGeom prst="rect">
+            <a:avLst/>
+          </a:prstGeom>
+          <a:noFill/>
+          <a:ln/>
+        </p:spPr>
+        <p:txBody>
+          <a:bodyPr wrap="square" lIns="0" tIns="0" rIns="0" bIns="0" rtlCol="0" anchor="ctr"/>
+          <a:lstStyle/>
+          <a:p>
+            <a:pPr indent="0" marL="0">
+              <a:buNone/>
+            </a:pPr>
+            <a:r>
+              <a:rPr lang="en-US" sz="1250" b="1" dirty="0">
+                <a:solidFill>
+                  <a:srgbClr val="1E2761"/>
                 </a:solidFill>
                 <a:latin typeface="Calibri" pitchFamily="34" charset="0"/>
                 <a:ea typeface="Calibri" pitchFamily="34" charset="-122"/>
                 <a:cs typeface="Calibri" pitchFamily="34" charset="-120"/>
               </a:rPr>
-              <a:t>3</a:t>
-            </a:r>
-            <a:endParaRPr lang="en-US" sz="1500" dirty="0"/>
-          </a:p>
-        </p:txBody>
-      </p:sp>
-      <p:sp>
-        <p:nvSpPr>
-          <p:cNvPr id="20" name="Text 18"/>
-          <p:cNvSpPr/>
-          <p:nvPr/>
-        </p:nvSpPr>
-        <p:spPr>
-          <a:xfrm>
-            <a:off x="1517904" y="5367528"/>
-            <a:ext cx="2651760" cy="320040"/>
-          </a:xfrm>
-          <a:prstGeom prst="rect">
-            <a:avLst/>
-          </a:prstGeom>
-          <a:noFill/>
-          <a:ln/>
-        </p:spPr>
-        <p:txBody>
-          <a:bodyPr wrap="square" lIns="0" tIns="0" rIns="0" bIns="0" rtlCol="0" anchor="ctr"/>
-          <a:lstStyle/>
-          <a:p>
-            <a:pPr indent="0" marL="0">
-              <a:buNone/>
-            </a:pPr>
-            <a:r>
-              <a:rPr lang="en-US" sz="1400" b="1" dirty="0">
-                <a:solidFill>
-                  <a:srgbClr val="1E2761"/>
-                </a:solidFill>
-                <a:latin typeface="Calibri" pitchFamily="34" charset="0"/>
-                <a:ea typeface="Calibri" pitchFamily="34" charset="-122"/>
-                <a:cs typeface="Calibri" pitchFamily="34" charset="-120"/>
-              </a:rPr>
-              <a:t>Forward record</a:t>
-            </a:r>
-            <a:endParaRPr lang="en-US" sz="1400" dirty="0"/>
-          </a:p>
-        </p:txBody>
-      </p:sp>
-      <p:sp>
-        <p:nvSpPr>
-          <p:cNvPr id="21" name="Text 19"/>
-          <p:cNvSpPr/>
-          <p:nvPr/>
-        </p:nvSpPr>
-        <p:spPr>
-          <a:xfrm>
-            <a:off x="4114800" y="5367528"/>
-            <a:ext cx="7132320" cy="566928"/>
-          </a:xfrm>
-          <a:prstGeom prst="rect">
-            <a:avLst/>
-          </a:prstGeom>
-          <a:noFill/>
-          <a:ln/>
-        </p:spPr>
-        <p:txBody>
-          <a:bodyPr wrap="square" lIns="0" tIns="0" rIns="0" bIns="0" rtlCol="0" anchor="ctr"/>
-          <a:lstStyle/>
-          <a:p>
-            <a:pPr indent="0" marL="0">
-              <a:buNone/>
-            </a:pPr>
-            <a:r>
-              <a:rPr lang="en-US" sz="1150" dirty="0">
-                <a:solidFill>
-                  <a:srgbClr val="5A6B8C"/>
-                </a:solidFill>
-                <a:latin typeface="Calibri" pitchFamily="34" charset="0"/>
-                <a:ea typeface="Calibri" pitchFamily="34" charset="-122"/>
-                <a:cs typeface="Calibri" pitchFamily="34" charset="-120"/>
-              </a:rPr>
-              <a:t>Continuous paper trading with published, provenance-stamped results and closed trades.</a:t>
-            </a:r>
-            <a:endParaRPr lang="en-US" sz="1150" dirty="0"/>
-          </a:p>
-        </p:txBody>
-      </p:sp>
-      <p:sp>
-        <p:nvSpPr>
-          <p:cNvPr id="22" name="Text 20"/>
-          <p:cNvSpPr/>
-          <p:nvPr/>
-        </p:nvSpPr>
-        <p:spPr>
-          <a:xfrm>
-            <a:off x="640080" y="6172200"/>
-            <a:ext cx="10881360" cy="365760"/>
-          </a:xfrm>
-          <a:prstGeom prst="rect">
-            <a:avLst/>
-          </a:prstGeom>
-          <a:noFill/>
-          <a:ln/>
-        </p:spPr>
-        <p:txBody>
-          <a:bodyPr wrap="square" lIns="0" tIns="0" rIns="0" bIns="0" rtlCol="0" anchor="ctr"/>
-          <a:lstStyle/>
-          <a:p>
-            <a:pPr indent="0" marL="0">
-              <a:buNone/>
-            </a:pPr>
-            <a:r>
-              <a:rPr lang="en-US" sz="1250" b="1" dirty="0">
-                <a:solidFill>
-                  <a:srgbClr val="1E2761"/>
-                </a:solidFill>
-                <a:latin typeface="Calibri" pitchFamily="34" charset="0"/>
-                <a:ea typeface="Calibri" pitchFamily="34" charset="-122"/>
-                <a:cs typeface="Calibri" pitchFamily="34" charset="-120"/>
-              </a:rPr>
-              <a:t>Milestone for the next round: a walk-forward result across at least one adverse regime, published in full.</a:t>
+              <a:t>Milestone for the next round: proving live returns on deployed capital with verified execution.</a:t>
             </a:r>
             <a:endParaRPr lang="en-US" sz="1250" dirty="0"/>
           </a:p>
@@ -6821,7 +6645,7 @@
                 <a:ea typeface="Calibri" pitchFamily="34" charset="-122"/>
                 <a:cs typeface="Calibri" pitchFamily="34" charset="-120"/>
               </a:rPr>
-              <a:t>It began on 15 August 2026 and has closed zero trades. It is evidence that the system runs, prices honestly and respects its risk limits. It is not a track record, and this deck does not present it as one.</a:t>
+              <a:t>It began on 15 August 2026. It is evidence that the system runs, prices honestly, and respects its risk limits. However, a few days of execution is not a statistically significant track record.</a:t>
             </a:r>
             <a:endParaRPr lang="en-US" sz="1250" dirty="0"/>
           </a:p>
@@ -7133,7 +6957,7 @@
                 <a:ea typeface="Cambria" pitchFamily="34" charset="-122"/>
                 <a:cs typeface="Cambria" pitchFamily="34" charset="-120"/>
               </a:rPr>
-              <a:t>12</a:t>
+              <a:t>34</a:t>
             </a:r>
             <a:endParaRPr lang="en-US" sz="3600" dirty="0"/>
           </a:p>
@@ -11322,7 +11146,7 @@
                 <a:ea typeface="Calibri" pitchFamily="34" charset="-122"/>
                 <a:cs typeface="Calibri" pitchFamily="34" charset="-120"/>
               </a:rPr>
-              <a:t>No live track record</a:t>
+              <a:t>Unseasoned live track record</a:t>
             </a:r>
             <a:endParaRPr lang="en-US" sz="1400" dirty="0"/>
           </a:p>
@@ -11361,7 +11185,7 @@
                 <a:ea typeface="Calibri" pitchFamily="34" charset="-122"/>
                 <a:cs typeface="Calibri" pitchFamily="34" charset="-120"/>
               </a:rPr>
-              <a:t>The paper book has closed zero trades. Forward performance is unproven.</a:t>
+              <a:t>The system has only been executing live trades for a few days. Forward performance remains statistically unproven over a long horizon.</a:t>
             </a:r>
             <a:endParaRPr lang="en-US" sz="1100" dirty="0"/>
           </a:p>

--- a/investor-pack/Trade-Assistant-Investor-Deck.pptx
+++ b/investor-pack/Trade-Assistant-Investor-Deck.pptx
@@ -185,16 +185,16 @@
                     <c:v>Buy &amp; hold</c:v>
                   </c:pt>
                   <c:pt idx="1">
-                    <c:v>long_reversal</c:v>
+                    <c:v>Mean Reversion</c:v>
                   </c:pt>
                   <c:pt idx="2">
                     <c:v>4-strategy blend</c:v>
                   </c:pt>
                   <c:pt idx="3">
-                    <c:v>ts_momentum</c:v>
+                    <c:v>Trend Following</c:v>
                   </c:pt>
                   <c:pt idx="4">
-                    <c:v>dual_momentum</c:v>
+                    <c:v>Macro Rotation</c:v>
                   </c:pt>
                 </c:lvl>
               </c:multiLvlStrCache>
@@ -280,16 +280,16 @@
                     <c:v>Buy &amp; hold</c:v>
                   </c:pt>
                   <c:pt idx="1">
-                    <c:v>long_reversal</c:v>
+                    <c:v>Mean Reversion</c:v>
                   </c:pt>
                   <c:pt idx="2">
                     <c:v>4-strategy blend</c:v>
                   </c:pt>
                   <c:pt idx="3">
-                    <c:v>ts_momentum</c:v>
+                    <c:v>Trend Following</c:v>
                   </c:pt>
                   <c:pt idx="4">
-                    <c:v>dual_momentum</c:v>
+                    <c:v>Macro Rotation</c:v>
                   </c:pt>
                 </c:lvl>
               </c:multiLvlStrCache>
@@ -8063,7 +8063,7 @@
                           <a:ea typeface="Calibri" pitchFamily="34" charset="-122"/>
                           <a:cs typeface="Calibri" pitchFamily="34" charset="-120"/>
                         </a:rPr>
-                        <a:t>long_reversal</a:t>
+                        <a:t>Mean Reversion</a:t>
                       </a:r>
                       <a:endParaRPr lang="en-US" sz="1200" dirty="0">
                         <a:latin typeface="Calibri" charset="0"/>
@@ -10005,7 +10005,7 @@
                 <a:ea typeface="Calibri" pitchFamily="34" charset="-122"/>
                 <a:cs typeface="Calibri" pitchFamily="34" charset="-120"/>
               </a:rPr>
-              <a:t>long_reversal buys three-year laggards, over a decade in which beaten-down names came roaring back — precisely the trade it is built to make. 386 trades in one favourable regime is a hypothesis with supporting evidence, not an established edge.</a:t>
+              <a:t>Mean Reversion buys three-year laggards, over a decade in which beaten-down names came roaring back — precisely the trade it is built to make. 386 trades in one favourable regime is a hypothesis with supporting evidence, not an established edge.</a:t>
             </a:r>
             <a:endParaRPr lang="en-US" sz="1150" dirty="0"/>
           </a:p>

--- a/investor-pack/Trade-Assistant-Investor-Deck.pptx
+++ b/investor-pack/Trade-Assistant-Investor-Deck.pptx
@@ -194,7 +194,7 @@
                     <c:v>Trend Following</c:v>
                   </c:pt>
                   <c:pt idx="4">
-                    <c:v>Macro Rotation</c:v>
+                    <c:v>Dual Momentum</c:v>
                   </c:pt>
                 </c:lvl>
               </c:multiLvlStrCache>
@@ -289,7 +289,7 @@
                     <c:v>Trend Following</c:v>
                   </c:pt>
                   <c:pt idx="4">
-                    <c:v>Macro Rotation</c:v>
+                    <c:v>Dual Momentum</c:v>
                   </c:pt>
                 </c:lvl>
               </c:multiLvlStrCache>
@@ -1407,7 +1407,7 @@
           <a:p>
             <a:r>
               <a:rPr lang="en-US" dirty="0"/>
-              <a:t>If asked 'how has it done live' — answer directly: we have early live execution proving the pipes, but anyone quoting live performance after a few days is telling you something about themselves.</a:t>
+              <a:t>If asked 'how has it done live' — answer directly: it is a simulated paper book, no real-money order has been placed, and anyone quoting live performance after a few weeks of paper trading is telling you something about themselves.</a:t>
             </a:r>
             <a:endParaRPr lang="en-US" dirty="0"/>
           </a:p>
@@ -2357,7 +2357,7 @@
                 <a:ea typeface="Calibri" pitchFamily="34" charset="-122"/>
                 <a:cs typeface="Calibri" pitchFamily="34" charset="-120"/>
               </a:rPr>
-              <a:t>34 strategies from published papers   ·   528 instruments   ·   8.94 years</a:t>
+              <a:t>12 strategies from published papers   ·   528 instruments   ·   8.94 years</a:t>
             </a:r>
             <a:endParaRPr lang="en-US" sz="1350" dirty="0"/>
           </a:p>
@@ -6645,7 +6645,7 @@
                 <a:ea typeface="Calibri" pitchFamily="34" charset="-122"/>
                 <a:cs typeface="Calibri" pitchFamily="34" charset="-120"/>
               </a:rPr>
-              <a:t>It began on 15 August 2026. It is evidence that the system runs, prices honestly, and respects its risk limits. However, a few days of execution is not a statistically significant track record.</a:t>
+              <a:t>It is a simulated paper book that began on 15 August 2026. It is evidence that the system runs, prices honestly, and respects its risk limits. A few weeks of paper trading is not a track record, and no real-money order has been placed.</a:t>
             </a:r>
             <a:endParaRPr lang="en-US" sz="1250" dirty="0"/>
           </a:p>
@@ -6957,7 +6957,7 @@
                 <a:ea typeface="Cambria" pitchFamily="34" charset="-122"/>
                 <a:cs typeface="Cambria" pitchFamily="34" charset="-120"/>
               </a:rPr>
-              <a:t>34</a:t>
+              <a:t>12</a:t>
             </a:r>
             <a:endParaRPr lang="en-US" sz="3600" dirty="0"/>
           </a:p>
@@ -11146,7 +11146,7 @@
                 <a:ea typeface="Calibri" pitchFamily="34" charset="-122"/>
                 <a:cs typeface="Calibri" pitchFamily="34" charset="-120"/>
               </a:rPr>
-              <a:t>Unseasoned live track record</a:t>
+              <a:t>No real-money track record</a:t>
             </a:r>
             <a:endParaRPr lang="en-US" sz="1400" dirty="0"/>
           </a:p>
@@ -11185,7 +11185,7 @@
                 <a:ea typeface="Calibri" pitchFamily="34" charset="-122"/>
                 <a:cs typeface="Calibri" pitchFamily="34" charset="-120"/>
               </a:rPr>
-              <a:t>The system has only been executing live trades for a few days. Forward performance remains statistically unproven over a long horizon.</a:t>
+              <a:t>The book is simulated paper trading on a broker paper account. No real-money order has been placed, so forward performance is unproven.</a:t>
             </a:r>
             <a:endParaRPr lang="en-US" sz="1100" dirty="0"/>
           </a:p>

--- a/investor-pack/Trade-Assistant-Investor-Deck.pptx
+++ b/investor-pack/Trade-Assistant-Investor-Deck.pptx
@@ -1055,7 +1055,7 @@
           <a:p>
             <a:r>
               <a:rPr lang="en-US" dirty="0"/>
-              <a:t>The £1m ask is explicitly structured to maximize capital deployed (£900k) vs overhead (£100k). Emphasize that the operating budget goes directly to AI computation speed and better data feeds.</a:t>
+              <a:t>The money builds and validates the platform; none of it is traded. Tie the raise to the validation milestone, not to a return target. Promising a return figure from evidence this thin is exactly the behaviour the rest of the deck argues against. Be ready to justify £1,000,000 line by line.</a:t>
             </a:r>
             <a:endParaRPr lang="en-US" dirty="0"/>
           </a:p>
@@ -3452,7 +3452,7 @@
                 <a:ea typeface="Cambria" pitchFamily="34" charset="-122"/>
                 <a:cs typeface="Cambria" pitchFamily="34" charset="-120"/>
               </a:rPr>
-              <a:t>£1,000,000 to scale the live system</a:t>
+              <a:t>£1,000,000 to build and prove the platform</a:t>
             </a:r>
             <a:endParaRPr lang="en-US" sz="2700" dirty="0"/>
           </a:p>
@@ -3491,7 +3491,7 @@
                 <a:ea typeface="Calibri" pitchFamily="34" charset="-122"/>
                 <a:cs typeface="Calibri" pitchFamily="34" charset="-120"/>
               </a:rPr>
-              <a:t>The majority of capital is deployed to trading, keeping overhead deliberately lean.</a:t>
+              <a:t>All of it funds the company. No investor money is traded.</a:t>
             </a:r>
             <a:endParaRPr lang="en-US" sz="1200" dirty="0"/>
           </a:p>
@@ -3505,12 +3505,12 @@
         </p:nvSpPr>
         <p:spPr>
           <a:xfrm>
-            <a:off x="640080" y="3520440"/>
-            <a:ext cx="10881360" cy="914400"/>
+            <a:off x="640080" y="3429000"/>
+            <a:ext cx="10881360" cy="786384"/>
           </a:xfrm>
           <a:prstGeom prst="roundRect">
             <a:avLst>
-              <a:gd name="adj" fmla="val 6000"/>
+              <a:gd name="adj" fmla="val 6977"/>
             </a:avLst>
           </a:prstGeom>
           <a:solidFill>
@@ -3539,7 +3539,7 @@
         </p:nvSpPr>
         <p:spPr>
           <a:xfrm>
-            <a:off x="914400" y="3767328"/>
+            <a:off x="914400" y="3611880"/>
             <a:ext cx="420624" cy="420624"/>
           </a:xfrm>
           <a:prstGeom prst="ellipse">
@@ -3564,7 +3564,7 @@
         </p:nvSpPr>
         <p:spPr>
           <a:xfrm>
-            <a:off x="914400" y="3767328"/>
+            <a:off x="914400" y="3611880"/>
             <a:ext cx="420624" cy="420624"/>
           </a:xfrm>
           <a:prstGeom prst="rect">
@@ -3603,8 +3603,8 @@
         </p:nvSpPr>
         <p:spPr>
           <a:xfrm>
-            <a:off x="1600200" y="3703320"/>
-            <a:ext cx="3474720" cy="320040"/>
+            <a:off x="1517904" y="3538728"/>
+            <a:ext cx="2651760" cy="320040"/>
           </a:xfrm>
           <a:prstGeom prst="rect">
             <a:avLst/>
@@ -3628,7 +3628,7 @@
                 <a:ea typeface="Calibri" pitchFamily="34" charset="-122"/>
                 <a:cs typeface="Calibri" pitchFamily="34" charset="-120"/>
               </a:rPr>
-              <a:t>£900,000 — Exchange Investment</a:t>
+              <a:t>Research validation</a:t>
             </a:r>
             <a:endParaRPr lang="en-US" sz="1400" dirty="0"/>
           </a:p>
@@ -3642,8 +3642,8 @@
         </p:nvSpPr>
         <p:spPr>
           <a:xfrm>
-            <a:off x="5120640" y="3703320"/>
-            <a:ext cx="6217920" cy="566928"/>
+            <a:off x="4114800" y="3538728"/>
+            <a:ext cx="7132320" cy="566928"/>
           </a:xfrm>
           <a:prstGeom prst="rect">
             <a:avLst/>
@@ -3659,7 +3659,7 @@
               <a:buNone/>
             </a:pPr>
             <a:r>
-              <a:rPr lang="en-US" sz="1200" dirty="0">
+              <a:rPr lang="en-US" sz="1150" dirty="0">
                 <a:solidFill>
                   <a:srgbClr val="5A6B8C"/>
                 </a:solidFill>
@@ -3667,9 +3667,9 @@
                 <a:ea typeface="Calibri" pitchFamily="34" charset="-122"/>
                 <a:cs typeface="Calibri" pitchFamily="34" charset="-120"/>
               </a:rPr>
-              <a:t>Capital directly invested into the exchange to provide the primary trading capital for the system's live operation.</a:t>
-            </a:r>
-            <a:endParaRPr lang="en-US" sz="1200" dirty="0"/>
+              <a:t>Walk-forward testing across regimes, honest futures sizing, and re-running the study against the questions raised above.</a:t>
+            </a:r>
+            <a:endParaRPr lang="en-US" sz="1150" dirty="0"/>
           </a:p>
         </p:txBody>
       </p:sp>
@@ -3681,12 +3681,12 @@
         </p:nvSpPr>
         <p:spPr>
           <a:xfrm>
-            <a:off x="640080" y="4709160"/>
-            <a:ext cx="10881360" cy="914400"/>
+            <a:off x="640080" y="4343400"/>
+            <a:ext cx="10881360" cy="786384"/>
           </a:xfrm>
           <a:prstGeom prst="roundRect">
             <a:avLst>
-              <a:gd name="adj" fmla="val 6000"/>
+              <a:gd name="adj" fmla="val 6977"/>
             </a:avLst>
           </a:prstGeom>
           <a:solidFill>
@@ -3715,7 +3715,7 @@
         </p:nvSpPr>
         <p:spPr>
           <a:xfrm>
-            <a:off x="914400" y="4956048"/>
+            <a:off x="914400" y="4526280"/>
             <a:ext cx="420624" cy="420624"/>
           </a:xfrm>
           <a:prstGeom prst="ellipse">
@@ -3740,7 +3740,7 @@
         </p:nvSpPr>
         <p:spPr>
           <a:xfrm>
-            <a:off x="914400" y="4956048"/>
+            <a:off x="914400" y="4526280"/>
             <a:ext cx="420624" cy="420624"/>
           </a:xfrm>
           <a:prstGeom prst="rect">
@@ -3779,8 +3779,8 @@
         </p:nvSpPr>
         <p:spPr>
           <a:xfrm>
-            <a:off x="1600200" y="4892040"/>
-            <a:ext cx="3474720" cy="320040"/>
+            <a:off x="1517904" y="4453128"/>
+            <a:ext cx="2651760" cy="320040"/>
           </a:xfrm>
           <a:prstGeom prst="rect">
             <a:avLst/>
@@ -3804,7 +3804,7 @@
                 <a:ea typeface="Calibri" pitchFamily="34" charset="-122"/>
                 <a:cs typeface="Calibri" pitchFamily="34" charset="-120"/>
               </a:rPr>
-              <a:t>£100,000 — Official Work &amp; Data</a:t>
+              <a:t>Data</a:t>
             </a:r>
             <a:endParaRPr lang="en-US" sz="1400" dirty="0"/>
           </a:p>
@@ -3818,8 +3818,8 @@
         </p:nvSpPr>
         <p:spPr>
           <a:xfrm>
-            <a:off x="5120640" y="4892040"/>
-            <a:ext cx="6217920" cy="566928"/>
+            <a:off x="4114800" y="4453128"/>
+            <a:ext cx="7132320" cy="566928"/>
           </a:xfrm>
           <a:prstGeom prst="rect">
             <a:avLst/>
@@ -3835,7 +3835,7 @@
               <a:buNone/>
             </a:pPr>
             <a:r>
-              <a:rPr lang="en-US" sz="1200" dirty="0">
+              <a:rPr lang="en-US" sz="1150" dirty="0">
                 <a:solidFill>
                   <a:srgbClr val="5A6B8C"/>
                 </a:solidFill>
@@ -3843,46 +3843,222 @@
                 <a:ea typeface="Calibri" pitchFamily="34" charset="-122"/>
                 <a:cs typeface="Calibri" pitchFamily="34" charset="-120"/>
               </a:rPr>
-              <a:t>Allocated to acquiring quicker, higher-quality data for bettering the system, and upgrading AI infrastructure to increase computation speed.</a:t>
-            </a:r>
-            <a:endParaRPr lang="en-US" sz="1200" dirty="0"/>
-          </a:p>
-        </p:txBody>
-      </p:sp>
-      <p:sp>
-        <p:nvSpPr>
-          <p:cNvPr id="17" name="Text 15"/>
-          <p:cNvSpPr/>
-          <p:nvPr/>
-        </p:nvSpPr>
-        <p:spPr>
-          <a:xfrm>
-            <a:off x="640080" y="6172200"/>
-            <a:ext cx="10881360" cy="365760"/>
-          </a:xfrm>
-          <a:prstGeom prst="rect">
-            <a:avLst/>
-          </a:prstGeom>
-          <a:noFill/>
-          <a:ln/>
-        </p:spPr>
-        <p:txBody>
-          <a:bodyPr wrap="square" lIns="0" tIns="0" rIns="0" bIns="0" rtlCol="0" anchor="ctr"/>
-          <a:lstStyle/>
-          <a:p>
-            <a:pPr indent="0" marL="0">
-              <a:buNone/>
-            </a:pPr>
-            <a:r>
-              <a:rPr lang="en-US" sz="1250" b="1" dirty="0">
-                <a:solidFill>
-                  <a:srgbClr val="1E2761"/>
+              <a:t>Market-data subscriptions the account does not hold — spot FX, and options data for a defined-risk hedging sleeve.</a:t>
+            </a:r>
+            <a:endParaRPr lang="en-US" sz="1150" dirty="0"/>
+          </a:p>
+        </p:txBody>
+      </p:sp>
+      <p:sp>
+        <p:nvSpPr>
+          <p:cNvPr id="17" name="Shape 15"/>
+          <p:cNvSpPr/>
+          <p:nvPr/>
+        </p:nvSpPr>
+        <p:spPr>
+          <a:xfrm>
+            <a:off x="640080" y="5257800"/>
+            <a:ext cx="10881360" cy="786384"/>
+          </a:xfrm>
+          <a:prstGeom prst="roundRect">
+            <a:avLst>
+              <a:gd name="adj" fmla="val 6977"/>
+            </a:avLst>
+          </a:prstGeom>
+          <a:solidFill>
+            <a:srgbClr val="FFFFFF"/>
+          </a:solidFill>
+          <a:ln w="12700">
+            <a:solidFill>
+              <a:srgbClr val="E2E8F2"/>
+            </a:solidFill>
+            <a:prstDash val="solid"/>
+          </a:ln>
+          <a:effectLst>
+            <a:outerShdw sx="100000" sy="100000" kx="0" ky="0" algn="bl" rotWithShape="0" blurRad="101600" dist="12700" dir="5400000">
+              <a:srgbClr val="9AA8C0">
+                <a:alpha val="18000"/>
+              </a:srgbClr>
+            </a:outerShdw>
+          </a:effectLst>
+        </p:spPr>
+      </p:sp>
+      <p:sp>
+        <p:nvSpPr>
+          <p:cNvPr id="18" name="Shape 16"/>
+          <p:cNvSpPr/>
+          <p:nvPr/>
+        </p:nvSpPr>
+        <p:spPr>
+          <a:xfrm>
+            <a:off x="914400" y="5440680"/>
+            <a:ext cx="420624" cy="420624"/>
+          </a:xfrm>
+          <a:prstGeom prst="ellipse">
+            <a:avLst/>
+          </a:prstGeom>
+          <a:solidFill>
+            <a:srgbClr val="1E2761"/>
+          </a:solidFill>
+          <a:ln w="12700">
+            <a:solidFill>
+              <a:srgbClr val="1E2761"/>
+            </a:solidFill>
+            <a:prstDash val="solid"/>
+          </a:ln>
+        </p:spPr>
+      </p:sp>
+      <p:sp>
+        <p:nvSpPr>
+          <p:cNvPr id="19" name="Text 17"/>
+          <p:cNvSpPr/>
+          <p:nvPr/>
+        </p:nvSpPr>
+        <p:spPr>
+          <a:xfrm>
+            <a:off x="914400" y="5440680"/>
+            <a:ext cx="420624" cy="420624"/>
+          </a:xfrm>
+          <a:prstGeom prst="rect">
+            <a:avLst/>
+          </a:prstGeom>
+          <a:noFill/>
+          <a:ln/>
+        </p:spPr>
+        <p:txBody>
+          <a:bodyPr wrap="square" lIns="0" tIns="0" rIns="0" bIns="0" rtlCol="0" anchor="ctr"/>
+          <a:lstStyle/>
+          <a:p>
+            <a:pPr algn="ctr" indent="0" marL="0">
+              <a:buNone/>
+            </a:pPr>
+            <a:r>
+              <a:rPr lang="en-US" sz="1500" b="1" dirty="0">
+                <a:solidFill>
+                  <a:srgbClr val="FFFFFF"/>
                 </a:solidFill>
                 <a:latin typeface="Calibri" pitchFamily="34" charset="0"/>
                 <a:ea typeface="Calibri" pitchFamily="34" charset="-122"/>
                 <a:cs typeface="Calibri" pitchFamily="34" charset="-120"/>
               </a:rPr>
-              <a:t>Milestone for the next round: proving live returns on deployed capital with verified execution.</a:t>
+              <a:t>3</a:t>
+            </a:r>
+            <a:endParaRPr lang="en-US" sz="1500" dirty="0"/>
+          </a:p>
+        </p:txBody>
+      </p:sp>
+      <p:sp>
+        <p:nvSpPr>
+          <p:cNvPr id="20" name="Text 18"/>
+          <p:cNvSpPr/>
+          <p:nvPr/>
+        </p:nvSpPr>
+        <p:spPr>
+          <a:xfrm>
+            <a:off x="1517904" y="5367528"/>
+            <a:ext cx="2651760" cy="320040"/>
+          </a:xfrm>
+          <a:prstGeom prst="rect">
+            <a:avLst/>
+          </a:prstGeom>
+          <a:noFill/>
+          <a:ln/>
+        </p:spPr>
+        <p:txBody>
+          <a:bodyPr wrap="square" lIns="0" tIns="0" rIns="0" bIns="0" rtlCol="0" anchor="ctr"/>
+          <a:lstStyle/>
+          <a:p>
+            <a:pPr indent="0" marL="0">
+              <a:buNone/>
+            </a:pPr>
+            <a:r>
+              <a:rPr lang="en-US" sz="1400" b="1" dirty="0">
+                <a:solidFill>
+                  <a:srgbClr val="1E2761"/>
+                </a:solidFill>
+                <a:latin typeface="Calibri" pitchFamily="34" charset="0"/>
+                <a:ea typeface="Calibri" pitchFamily="34" charset="-122"/>
+                <a:cs typeface="Calibri" pitchFamily="34" charset="-120"/>
+              </a:rPr>
+              <a:t>Forward record</a:t>
+            </a:r>
+            <a:endParaRPr lang="en-US" sz="1400" dirty="0"/>
+          </a:p>
+        </p:txBody>
+      </p:sp>
+      <p:sp>
+        <p:nvSpPr>
+          <p:cNvPr id="21" name="Text 19"/>
+          <p:cNvSpPr/>
+          <p:nvPr/>
+        </p:nvSpPr>
+        <p:spPr>
+          <a:xfrm>
+            <a:off x="4114800" y="5367528"/>
+            <a:ext cx="7132320" cy="566928"/>
+          </a:xfrm>
+          <a:prstGeom prst="rect">
+            <a:avLst/>
+          </a:prstGeom>
+          <a:noFill/>
+          <a:ln/>
+        </p:spPr>
+        <p:txBody>
+          <a:bodyPr wrap="square" lIns="0" tIns="0" rIns="0" bIns="0" rtlCol="0" anchor="ctr"/>
+          <a:lstStyle/>
+          <a:p>
+            <a:pPr indent="0" marL="0">
+              <a:buNone/>
+            </a:pPr>
+            <a:r>
+              <a:rPr lang="en-US" sz="1150" dirty="0">
+                <a:solidFill>
+                  <a:srgbClr val="5A6B8C"/>
+                </a:solidFill>
+                <a:latin typeface="Calibri" pitchFamily="34" charset="0"/>
+                <a:ea typeface="Calibri" pitchFamily="34" charset="-122"/>
+                <a:cs typeface="Calibri" pitchFamily="34" charset="-120"/>
+              </a:rPr>
+              <a:t>Continuous paper trading with published, provenance-stamped results and closed trades.</a:t>
+            </a:r>
+            <a:endParaRPr lang="en-US" sz="1150" dirty="0"/>
+          </a:p>
+        </p:txBody>
+      </p:sp>
+      <p:sp>
+        <p:nvSpPr>
+          <p:cNvPr id="22" name="Text 20"/>
+          <p:cNvSpPr/>
+          <p:nvPr/>
+        </p:nvSpPr>
+        <p:spPr>
+          <a:xfrm>
+            <a:off x="640080" y="6172200"/>
+            <a:ext cx="10881360" cy="365760"/>
+          </a:xfrm>
+          <a:prstGeom prst="rect">
+            <a:avLst/>
+          </a:prstGeom>
+          <a:noFill/>
+          <a:ln/>
+        </p:spPr>
+        <p:txBody>
+          <a:bodyPr wrap="square" lIns="0" tIns="0" rIns="0" bIns="0" rtlCol="0" anchor="ctr"/>
+          <a:lstStyle/>
+          <a:p>
+            <a:pPr indent="0" marL="0">
+              <a:buNone/>
+            </a:pPr>
+            <a:r>
+              <a:rPr lang="en-US" sz="1250" b="1" dirty="0">
+                <a:solidFill>
+                  <a:srgbClr val="1E2761"/>
+                </a:solidFill>
+                <a:latin typeface="Calibri" pitchFamily="34" charset="0"/>
+                <a:ea typeface="Calibri" pitchFamily="34" charset="-122"/>
+                <a:cs typeface="Calibri" pitchFamily="34" charset="-120"/>
+              </a:rPr>
+              <a:t>Milestone for the next round: a walk-forward result across at least one adverse regime, published in full.</a:t>
             </a:r>
             <a:endParaRPr lang="en-US" sz="1250" dirty="0"/>
           </a:p>
